--- a/docs/presentation/uwf_idc6940_capstone.pptx
+++ b/docs/presentation/uwf_idc6940_capstone.pptx
@@ -155,7 +155,7 @@
     </p:spTree>
     <p:extLst>
       <p:ext uri="{BB962C8B-B14F-4D97-AF65-F5344CB8AC3E}">
-        <p14:creationId xmlns:p14="http://schemas.microsoft.com/office/powerpoint/2010/main" val="606363188"/>
+        <p14:creationId xmlns:p14="http://schemas.microsoft.com/office/powerpoint/2010/main" val="2090135406"/>
       </p:ext>
     </p:extLst>
   </p:cSld>
@@ -299,15 +299,7 @@
           <a:bodyPr/>
           <a:lstStyle/>
           <a:p>
-            <a:r>
-              <a:rPr lang="en-US" dirty="0"/>
-              <a:t>SLIDE 1 SCRIPT (~30 seconds):
-"Good [morning/afternoon/evening] everyone. Thank you for joining today. My name is Farooq Mahmud,
-and this is my capstone presentation for IDC 6940. The project is titled 'Comparing ARIMA and LSTM
-for Short-Term Forecasting of Daily Average Uber Trip Duration in New York City.' Over the next 20
-minutes I'll walk you through the motivation, the methods, the implementation, the results, and
-what I learned from this project. Let's get started."</a:t>
-            </a:r>
+            <a:endParaRPr lang="en-US" dirty="0"/>
           </a:p>
         </p:txBody>
       </p:sp>
@@ -391,23 +383,7 @@
           <a:bodyPr/>
           <a:lstStyle/>
           <a:p>
-            <a:r>
-              <a:rPr lang="en-US" dirty="0"/>
-              <a:t>SLIDE 10 SCRIPT (~1.5 minutes):
-"For the experimental design, both models use the same chronological split. The last
-14 days of 2024—December 18 through December 31—are held out as the test set. The
-preceding 30 days form the validation set, and all remaining data is training.
-This strict chronological split is essential. You must never train on future data
-when evaluating a time series model, because that would leak future information and
-produce artificially optimistic results.
-Both models are evaluated on the exact same 14 test days using two metrics. sMAPE—
-symmetric mean absolute percentage error—is scale-independent and symmetric, treating
-over- and under-forecasting equally. MASE—mean absolute scaled error—benchmarks
-the forecast against a naive one-step forecast on the training data. A MASE below 1
-means the model beats the naive baseline; above 1 means it doesn't. Since sMAPE is
-returned as a proportion by the R Metrics package, I multiply by 100 to express it
-as a percentage."</a:t>
-            </a:r>
+            <a:endParaRPr lang="en-US" dirty="0"/>
           </a:p>
         </p:txBody>
       </p:sp>
@@ -491,29 +467,7 @@
           <a:bodyPr/>
           <a:lstStyle/>
           <a:p>
-            <a:r>
-              <a:rPr lang="en-US" dirty="0"/>
-              <a:t>SLIDE 11 SCRIPT (~2 minutes):
-"Now let me talk about the code and implementation, because this is where a lot of the
-real work happened.
-The code is entirely original. I did not copy from any specific GitHub repository.
-The PySpark preprocessing pipeline—all the filtering, cleaning, and aggregation—I
-wrote from scratch for this project, guided by the PySpark documentation and the
-structure of the NYC TLC data dictionary.
-The R LSTM pipeline follows well-known patterns documented in the Keras time series
-tutorial and the rwanjohi LSTM-in-R repository. However, the specific combination
-of the functional Keras API, custom create_sequences function, min-max scaling
-closures, recursive forecasting loop, and MASE/sMAPE evaluation is original code
-I wrote for this project.
-I actually spent a good part of the project searching public GitHub repos to check
-whether similar code existed. The conclusion was that no single public repository
-contains code substantially identical to the capstone's appendix. The closest
-conceptual matches are the Keras official time series tutorial—which the paper
-already cites—and rwanjohi's LSTM R repo, which uses a different API style and
-differencing-based preprocessing rather than sliding windows.
-The biggest implementation challenge was LSTM reproducibility, which I'll talk
-about on the next slide."</a:t>
-            </a:r>
+            <a:endParaRPr lang="en-US" dirty="0"/>
           </a:p>
         </p:txBody>
       </p:sp>
@@ -597,27 +551,7 @@
           <a:bodyPr/>
           <a:lstStyle/>
           <a:p>
-            <a:r>
-              <a:rPr lang="en-US" dirty="0"/>
-              <a:t>SLIDE 12 SCRIPT (~2 minutes):
-"The single biggest challenge in the implementation was LSTM reproducibility. Unlike
-ARIMA, which is a deterministic algorithm given the same data, LSTM training is
-stochastic. The randomness comes from three sources: weight initialization, the
-random validation split during training, and dropout during each forward pass.
-I attempted to fix the random seed using TensorFlow's set_random_seed and R's
-set.seed, but in our environment—R with Keras on Windows—seed fixing did not produce
-consistent results across runs. The sMAPE and MASE values shifted noticeably from
-run to run.
-The solution I adopted was to run the LSTM pipeline five independent times and report
-the mean and standard deviation of the metrics across those five runs. This gives a
-statistically honest summary: you can see both the central tendency and the variability
-of the LSTM's performance, which makes the comparison with the deterministic ARIMA
-result much more meaningful.
-A second challenge was infrastructure: running PySpark on Google Colab required
-careful management of the Colab session, mounting Google Drive, and handling the
-fact that Colab sessions time out. I broke the pipeline into checkpointed steps
-so I could resume without reprocessing everything from scratch."</a:t>
-            </a:r>
+            <a:endParaRPr lang="en-US" dirty="0"/>
           </a:p>
         </p:txBody>
       </p:sp>
@@ -701,20 +635,7 @@
           <a:bodyPr/>
           <a:lstStyle/>
           <a:p>
-            <a:r>
-              <a:rPr lang="en-US" dirty="0"/>
-              <a:t>SLIDE 13 SCRIPT (~1.5 minutes):
-"Let's look at the results. This plot shows the ARIMA 14-day point forecast together
-with the 80% and 95% prediction intervals, compared against the actual values.
-A few things to notice. First, the ARIMA forecast is quite flat. This is expected
-behavior for ARIMA(1,1,4). Because the differencing term is 1, the model predicts
-future changes from the current level. As we go further out, the expected change
-converges to zero, so the forecast stabilizes around the recent average.
-Second, most of the actual values fall within the 95% prediction interval, which
-suggests the intervals are reasonably well-calibrated. A couple of points—particularly
-around Christmas—fall at the edge of or outside the 80% interval, reflecting the
-holiday-driven deviation that neither model anticipated."</a:t>
-            </a:r>
+            <a:endParaRPr lang="en-US" dirty="0"/>
           </a:p>
         </p:txBody>
       </p:sp>
@@ -798,24 +719,7 @@
           <a:bodyPr/>
           <a:lstStyle/>
           <a:p>
-            <a:r>
-              <a:rPr lang="en-US" dirty="0"/>
-              <a:t>SLIDE 14 SCRIPT (~2 minutes):
-"Now let's compare the two models side by side. The left panel shows the 14-day
-actual values in dark purple, the ARIMA forecast in teal, and the LSTM forecast in orange.
-ARIMA is flat—it predicts a nearly constant value for all 14 days. LSTM is slightly
-smoother with a gentle downward trend, reflecting that the network is averaging toward
-the historical mean and picking up a slight downward signal in the recent data. Neither
-model captured the sharp Christmas dip on December 25.
-The table on the right shows the metric results. ARIMA achieved an sMAPE of 7.58%
-and a MASE of 1.93. The LSTM averaged an sMAPE of 8.05% plus or minus 0.34 percentage
-points, and a MASE of 2.09 plus or minus 0.09, across five independent runs.
-On both metrics, ARIMA edged out LSTM. The gap is modest—less than half a percentage
-point on sMAPE—but it's consistent. Both models have MASE above 1, which means
-neither beats a naive one-step lag baseline on this test window. That's an honest
-and important result: the 14-day holiday period at the end of the year is simply
-hard to forecast with a univariate model."</a:t>
-            </a:r>
+            <a:endParaRPr lang="en-US" dirty="0"/>
           </a:p>
         </p:txBody>
       </p:sp>
@@ -899,16 +803,7 @@
           <a:bodyPr/>
           <a:lstStyle/>
           <a:p>
-            <a:r>
-              <a:rPr lang="en-US" dirty="0"/>
-              <a:t>SLIDE 15 SCRIPT (~1.5 minutes):
-"The LSTM training and validation loss curves both decrease quickly in early epochs and
-then flatten. The diamond markers indicate the epochs where the minimum training loss
-and minimum validation loss occurred. There is no sign of classic overfitting: the
-validation loss does not start rising while the training loss continues to fall. Both
-curves stabilize well within the 100-epoch budget, confirming that early stopping
-fired appropriately and that additional epochs would not have improved the forecast."</a:t>
-            </a:r>
+            <a:endParaRPr lang="en-US" dirty="0"/>
           </a:p>
         </p:txBody>
       </p:sp>
@@ -992,25 +887,7 @@
           <a:bodyPr/>
           <a:lstStyle/>
           <a:p>
-            <a:r>
-              <a:rPr lang="en-US" dirty="0"/>
-              <a:t>SLIDE 16 SCRIPT (~1.5 minutes):
-"So what do these results mean? A few key interpretations.
-First, for a short-horizon univariate forecasting problem with only 366 training
-observations, ARIMA is a strong baseline. It is deterministic, interpretable, and
-runs in seconds. The LSTM, by contrast, requires careful hyperparameter tuning,
-careful handling of scaling, early stopping, and multiple runs to get a stable metric
-estimate. All that extra complexity yielded a slightly worse result.
-Second, both models struggled with holiday effects. December 25 saw a sharp drop
-in average trip duration, likely because fewer riders take longer trips on Christmas
-Day. A univariate model with no calendar features simply cannot anticipate this.
-Third, the LSTM's run-to-run variability—roughly ±0.34 sMAPE points—is not negligible.
-When two models are separated by less than half a percentage point, that variability
-matters. Reporting a single LSTM run would be misleading.
-The broader takeaway is that the assumption 'deep learning is always better' does
-not hold in small-data, short-horizon settings. ARIMA's simplicity is a strength
-when data are limited."</a:t>
-            </a:r>
+            <a:endParaRPr lang="en-US" dirty="0"/>
           </a:p>
         </p:txBody>
       </p:sp>
@@ -1094,21 +971,7 @@
           <a:bodyPr/>
           <a:lstStyle/>
           <a:p>
-            <a:r>
-              <a:rPr lang="en-US" dirty="0"/>
-              <a:t>SLIDE 17 SCRIPT (~1 minute):
-"Let me summarize the conclusions. The capstone set out to answer a concrete question:
-ARIMA or LSTM for 14-day forecasting of daily Uber trip duration? The answer is that
-ARIMA performed slightly better on sMAPE and MASE in this controlled experiment.
-The work contributes a fully reproducible pipeline—from a 200-million-row PySpark ETL
-all the way through to metric evaluation—that others can replicate and extend. The honest
-reporting of LSTM variability across five runs adds statistical rigor that a single
-reported run would lack.
-The result is not a blanket endorsement of ARIMA over neural networks. It's a concrete,
-data-driven demonstration that in the right conditions—small sample, univariate,
-short horizon—classical methods remain competitive. Choosing the right tool requires
-understanding both the data and the limitations of each method."</a:t>
-            </a:r>
+            <a:endParaRPr lang="en-US" dirty="0"/>
           </a:p>
         </p:txBody>
       </p:sp>
@@ -1192,25 +1055,7 @@
           <a:bodyPr/>
           <a:lstStyle/>
           <a:p>
-            <a:r>
-              <a:rPr lang="en-US" dirty="0"/>
-              <a:t>SLIDE 18 SCRIPT (~1 minute):
-"Looking forward, there are three concrete directions to extend this work.
-First and most impactful: extend the dataset. More years of NYC TLC data would give
-the LSTM far more training sequences and might change the comparison result significantly.
-A model trained on three or four years of data versus one year is a fundamentally
-different experiment.
-Second, add external covariates. Weather data, a holiday indicator, and day-of-week
-features are readily available and would likely help both models, but especially LSTM,
-which can incorporate multivariate inputs naturally.
-Third, solve the reproducibility problem. Pinning the TensorFlow version, using a
-controlled Docker environment, and exploring newer deterministic training options
-in TensorFlow 2.x could resolve the seed-fixing issue and eliminate the need for
-multiple runs.
-A fourth longer-term direction would be to compare against modern sequence models
-like Transformers or temporal convolutional networks on the same dataset, to see
-whether the ARIMA advantage holds against a broader range of neural approaches."</a:t>
-            </a:r>
+            <a:endParaRPr lang="en-US" dirty="0"/>
           </a:p>
         </p:txBody>
       </p:sp>
@@ -1294,13 +1139,7 @@
           <a:bodyPr/>
           <a:lstStyle/>
           <a:p>
-            <a:r>
-              <a:rPr lang="en-US" dirty="0"/>
-              <a:t>SLIDE 19 SCRIPT (~30 seconds):
-"Thank you for your time. The code, data, and outputs for this project are all
-publicly available via the GitHub release linked in the paper. I'm happy to answer
-any questions."</a:t>
-            </a:r>
+            <a:endParaRPr lang="en-US" dirty="0"/>
           </a:p>
         </p:txBody>
       </p:sp>
@@ -1384,14 +1223,7 @@
           <a:bodyPr/>
           <a:lstStyle/>
           <a:p>
-            <a:r>
-              <a:rPr lang="en-US" dirty="0"/>
-              <a:t>SLIDE 2 SCRIPT (~30 seconds):
-"Here's a quick roadmap of the presentation. We'll start with the problem and why it matters,
-then move through the data, the two models, the implementation experience, the results, and
-close with the conclusions and future directions. I'll try to be as concrete as possible
-so you can see exactly what was done at each stage."</a:t>
-            </a:r>
+            <a:endParaRPr lang="en-US" dirty="0"/>
           </a:p>
         </p:txBody>
       </p:sp>
@@ -1475,20 +1307,7 @@
           <a:bodyPr/>
           <a:lstStyle/>
           <a:p>
-            <a:r>
-              <a:rPr lang="en-US" dirty="0"/>
-              <a:t>SLIDE 3 SCRIPT (~1 minute):
-"The central question driving this capstone is straightforward: for a short-horizon, univariate
-time series, does a classical statistical model—ARIMA—outperform a neural sequence model—LSTM?
-This question matters in practice. If you're an operations manager at Uber trying to schedule
-drivers two weeks out, you need a reliable forecast. You also need to know whether it's worth
-the additional complexity of a deep learning model, or whether a simpler classical approach
-gives you equally good—or even better—results.
-The specific target variable is the daily average Uber trip duration in minutes in New York City.
-We have 366 daily observations for the full year 2024, and we produce a 14-day ahead forecast
-with both methods, evaluated on the same test window using two well-established metrics:
-sMAPE and MASE."</a:t>
-            </a:r>
+            <a:endParaRPr lang="en-US" dirty="0"/>
           </a:p>
         </p:txBody>
       </p:sp>
@@ -1572,23 +1391,7 @@
           <a:bodyPr/>
           <a:lstStyle/>
           <a:p>
-            <a:r>
-              <a:rPr lang="en-US" dirty="0"/>
-              <a:t>SLIDE 4 SCRIPT (~1.5 minutes):
-"Let me give a bit more background. Time-series forecasting sits at the heart of statistics and
-data science. ARIMA—AutoRegressive Integrated Moving Average—has been the workhorse of
-univariate forecasting for decades. It's interpretable, well-understood, and performs
-surprisingly well on datasets where the underlying dynamics are relatively simple.
-LSTM networks, which are a type of recurrent neural network designed by Hochreiter and
-Schmidhuber in 1997, were built specifically to capture long-range temporal dependencies
-that vanilla RNNs struggle with because of the vanishing gradient problem. They have become
-extremely popular for time-series tasks ranging from financial forecasting to natural language
-processing.
-The open question this project addresses is whether LSTM's added modeling power is actually
-beneficial when you have a relatively small dataset—366 observations—and a univariate setting.
-Comparative studies in the literature, like the one cited by Prabhat et al. 2024, show mixed
-results and motivate exactly this kind of direct, reproducible comparison."</a:t>
-            </a:r>
+            <a:endParaRPr lang="en-US" dirty="0"/>
           </a:p>
         </p:txBody>
       </p:sp>
@@ -1672,22 +1475,7 @@
           <a:bodyPr/>
           <a:lstStyle/>
           <a:p>
-            <a:r>
-              <a:rPr lang="en-US" dirty="0"/>
-              <a:t>SLIDE 5 SCRIPT (~1.5 minutes):
-"The data come from the New York City Taxi and Limousine Commission, which publishes monthly
-parquet files of every High-Volume For-Hire Vehicle trip in New York City. The raw dataset
-for 2024 contains over 200 million trip records. Of those, about 179 million belong to Uber,
-identified by the license code HV0003.
-The preprocessing was done in PySpark running on Google Colab, because the raw files are
-simply too large to process on a laptop. After filtering to Uber trips, I derived two new
-columns—trip duration in minutes and average speed in miles per hour. I then applied a
-two-step outlier removal: first basic range filters to remove physically impossible trips
-such as a zero-minute duration or a 200-mile ride, and then an IQR-based filter to remove
-statistical outliers. After all of that, about 159 million rows remained, which were
-aggregated to a single CSV file with 366 rows—one row per day—containing the date and the
-mean trip duration for that day."</a:t>
-            </a:r>
+            <a:endParaRPr lang="en-US" dirty="0"/>
           </a:p>
         </p:txBody>
       </p:sp>
@@ -1771,16 +1559,7 @@
           <a:bodyPr/>
           <a:lstStyle/>
           <a:p>
-            <a:r>
-              <a:rPr lang="en-US" dirty="0"/>
-              <a:t>SLIDE 6 SCRIPT (~1 minute):
-"Here's what the final time series looks like. You can see 366 points running from January
-through December 2024. There's a clear seasonal pattern—trip durations tend to be longer on
-weekdays than on weekends, and there are dips around major holidays. The December 25 dip is
-particularly visible. The series is relatively smooth and stationary-looking, which is
-actually a favorable property for ARIMA. For LSTM, the weekly oscillation gives the model
-a repeating pattern to learn."</a:t>
-            </a:r>
+            <a:endParaRPr lang="en-US" dirty="0"/>
           </a:p>
         </p:txBody>
       </p:sp>
@@ -1864,23 +1643,7 @@
           <a:bodyPr/>
           <a:lstStyle/>
           <a:p>
-            <a:r>
-              <a:rPr lang="en-US" dirty="0"/>
-              <a:t>SLIDE 7 SCRIPT (~2 minutes):
-"Now let me walk through the mathematics. ARIMA stands for AutoRegressive Integrated Moving
-Average. The general form is ARIMA(p, d, q). After d rounds of differencing to achieve
-stationarity, the model expresses the current value as a linear combination of the p most
-recent past values—that's the autoregressive part—plus a linear combination of the q most
-recent forecast errors—that's the moving average part—plus white noise.
-The R forecast package's auto.arima function automates model selection. It first runs the
-Augmented Dickey-Fuller test to determine how many rounds of differencing are needed, then
-searches over combinations of p and q, selecting the one that minimizes AIC and BIC.
-In this project, auto.arima selected ARIMA(1, 1, 4). That means: one differencing step to
-remove the trend and achieve stationarity, an autoregressive term that depends on the most
-recent observation, and four moving-average terms that incorporate forecast errors from the
-last four time steps. Intuitively, the MA(4) terms help the model recover quickly from
-short-term anomalies like an unusual traffic event."</a:t>
-            </a:r>
+            <a:endParaRPr lang="en-US" dirty="0"/>
           </a:p>
         </p:txBody>
       </p:sp>
@@ -1964,27 +1727,7 @@
           <a:bodyPr/>
           <a:lstStyle/>
           <a:p>
-            <a:r>
-              <a:rPr lang="en-US" dirty="0"/>
-              <a:t>SLIDE 8 SCRIPT (~2 minutes):
-"The second model is an LSTM network implemented in R using the Keras package. Let me
-describe the architecture. The input to the model is a 3-dimensional array: samples,
-time steps, and features. Here, features is just 1 since this is a univariate series.
-The time steps dimension is the sequence length, which I set to 21 days. I chose 21
-because the series shows weekly cycles—weekdays and weekends behave differently. With
-three weeks of context, the LSTM sees three full repetitions of the weekly pattern,
-giving it enough information to recognize and extrapolate the cycle.
-The model has a single LSTM layer with 32 hidden units. After the LSTM layer there's a
-dropout layer with a rate of 0.2, which randomly zeros out 20% of the units during
-each training step to reduce overfitting. Finally, a dense output layer with a single
-neuron produces the predicted value for the next day.
-The model is trained to minimize mean squared error using the Adam optimizer.
-Early stopping monitors the validation loss with a patience of 15 epochs and restores
-the best weights found during training.
-Forecasting is done recursively: I feed the last 21-day window before the test period
-to the model, predict day 1, append that prediction to the window, drop the oldest
-value, and repeat 14 times to get the full 14-day forecast."</a:t>
-            </a:r>
+            <a:endParaRPr lang="en-US" dirty="0"/>
           </a:p>
         </p:txBody>
       </p:sp>
@@ -2068,12 +1811,7 @@
           <a:bodyPr/>
           <a:lstStyle/>
           <a:p>
-            <a:r>
-              <a:rPr lang="en-US" dirty="0"/>
-              <a:t>SLIDE 9 SCRIPT (~30 seconds):
-"Here's a visual of the LSTM architecture showing how data flows from the input sequence
-through the LSTM layer, dropout, and into the single output neuron."</a:t>
-            </a:r>
+            <a:endParaRPr lang="en-US" dirty="0"/>
           </a:p>
         </p:txBody>
       </p:sp>

--- a/docs/presentation/uwf_idc6940_capstone.pptx
+++ b/docs/presentation/uwf_idc6940_capstone.pptx
@@ -4,9 +4,6 @@
   <p:sldMasterIdLst>
     <p:sldMasterId id="2147483648" r:id="rId1"/>
   </p:sldMasterIdLst>
-  <p:notesMasterIdLst>
-    <p:notesMasterId r:id="rId21"/>
-  </p:notesMasterIdLst>
   <p:sldIdLst>
     <p:sldId id="256" r:id="rId2"/>
     <p:sldId id="257" r:id="rId3"/>
@@ -28,7 +25,10 @@
     <p:sldId id="273" r:id="rId19"/>
     <p:sldId id="274" r:id="rId20"/>
   </p:sldIdLst>
-  <p:sldSz cx="9144000" cy="6858000" type="screen4x3"/>
+  <p:notesMasterIdLst>
+    <p:notesMasterId r:id="rId21"/>
+  </p:notesMasterIdLst>
+  <p:sldSz cx="9144000" cy="6858000"/>
   <p:notesSz cx="6858000" cy="9144000"/>
   <p:defaultTextStyle>
     <a:lvl1pPr marL="0" algn="l" defTabSz="914400" rtl="0" eaLnBrk="1" latinLnBrk="0" hangingPunct="1">
@@ -122,11 +122,6 @@
       </a:defRPr>
     </a:lvl9pPr>
   </p:defaultTextStyle>
-  <p:extLst>
-    <p:ext uri="{EFAFB233-063F-42B5-8137-9DF3F51BA10A}">
-      <p15:sldGuideLst xmlns:p15="http://schemas.microsoft.com/office/powerpoint/2012/main"/>
-    </p:ext>
-  </p:extLst>
 </p:presentation>
 </file>
 
@@ -152,10 +147,234 @@
           <a:chExt cx="0" cy="0"/>
         </a:xfrm>
       </p:grpSpPr>
+      <p:sp>
+        <p:nvSpPr>
+          <p:cNvPr id="2" name="Header Placeholder 1"/>
+          <p:cNvSpPr>
+            <a:spLocks noGrp="1"/>
+          </p:cNvSpPr>
+          <p:nvPr>
+            <p:ph type="hdr" sz="quarter"/>
+          </p:nvPr>
+        </p:nvSpPr>
+        <p:spPr>
+          <a:xfrm>
+            <a:off x="0" y="0"/>
+            <a:ext cx="2971800" cy="458788"/>
+          </a:xfrm>
+          <a:prstGeom prst="rect">
+            <a:avLst/>
+          </a:prstGeom>
+        </p:spPr>
+        <p:txBody>
+          <a:bodyPr vert="horz" lIns="91440" tIns="45720" rIns="91440" bIns="45720" rtlCol="0"/>
+          <a:lstStyle>
+            <a:lvl1pPr algn="l">
+              <a:defRPr sz="1200"/>
+            </a:lvl1pPr>
+          </a:lstStyle>
+          <a:p>
+            <a:endParaRPr lang="en-US"/>
+          </a:p>
+        </p:txBody>
+      </p:sp>
+      <p:sp>
+        <p:nvSpPr>
+          <p:cNvPr id="3" name="Date Placeholder 2"/>
+          <p:cNvSpPr>
+            <a:spLocks noGrp="1"/>
+          </p:cNvSpPr>
+          <p:nvPr>
+            <p:ph type="dt" idx="1"/>
+          </p:nvPr>
+        </p:nvSpPr>
+        <p:spPr>
+          <a:xfrm>
+            <a:off x="3884613" y="0"/>
+            <a:ext cx="2971800" cy="458788"/>
+          </a:xfrm>
+          <a:prstGeom prst="rect">
+            <a:avLst/>
+          </a:prstGeom>
+        </p:spPr>
+        <p:txBody>
+          <a:bodyPr vert="horz" lIns="91440" tIns="45720" rIns="91440" bIns="45720" rtlCol="0"/>
+          <a:lstStyle>
+            <a:lvl1pPr algn="r">
+              <a:defRPr sz="1200"/>
+            </a:lvl1pPr>
+          </a:lstStyle>
+          <a:p>
+            <a:fld id="{5282F153-3F37-0F45-9E97-73ACFA13230C}" type="datetimeFigureOut">
+              <a:rPr lang="en-US"/>
+              <a:t>7/23/19</a:t>
+            </a:fld>
+            <a:endParaRPr lang="en-US"/>
+          </a:p>
+        </p:txBody>
+      </p:sp>
+      <p:sp>
+        <p:nvSpPr>
+          <p:cNvPr id="4" name="Slide Image Placeholder 3"/>
+          <p:cNvSpPr>
+            <a:spLocks noGrp="1" noRot="1" noChangeAspect="1"/>
+          </p:cNvSpPr>
+          <p:nvPr>
+            <p:ph type="sldImg" idx="2"/>
+          </p:nvPr>
+        </p:nvSpPr>
+        <p:spPr>
+          <a:xfrm>
+            <a:off x="685800" y="1143000"/>
+            <a:ext cx="5486400" cy="3086100"/>
+          </a:xfrm>
+          <a:prstGeom prst="rect">
+            <a:avLst/>
+          </a:prstGeom>
+          <a:noFill/>
+          <a:ln w="12700">
+            <a:solidFill>
+              <a:prstClr val="black"/>
+            </a:solidFill>
+          </a:ln>
+        </p:spPr>
+        <p:txBody>
+          <a:bodyPr vert="horz" lIns="91440" tIns="45720" rIns="91440" bIns="45720" rtlCol="0" anchor="ctr"/>
+          <a:lstStyle/>
+          <a:p>
+            <a:endParaRPr lang="en-US"/>
+          </a:p>
+        </p:txBody>
+      </p:sp>
+      <p:sp>
+        <p:nvSpPr>
+          <p:cNvPr id="5" name="Notes Placeholder 4"/>
+          <p:cNvSpPr>
+            <a:spLocks noGrp="1"/>
+          </p:cNvSpPr>
+          <p:nvPr>
+            <p:ph type="body" sz="quarter" idx="3"/>
+          </p:nvPr>
+        </p:nvSpPr>
+        <p:spPr>
+          <a:xfrm>
+            <a:off x="685800" y="4400550"/>
+            <a:ext cx="5486400" cy="3600450"/>
+          </a:xfrm>
+          <a:prstGeom prst="rect">
+            <a:avLst/>
+          </a:prstGeom>
+        </p:spPr>
+        <p:txBody>
+          <a:bodyPr vert="horz" lIns="91440" tIns="45720" rIns="91440" bIns="45720" rtlCol="0"/>
+          <a:lstStyle/>
+          <a:p>
+            <a:pPr lvl="0"/>
+            <a:r>
+              <a:rPr lang="en-US"/>
+              <a:t>Click to edit Master text styles</a:t>
+            </a:r>
+          </a:p>
+          <a:p>
+            <a:pPr lvl="1"/>
+            <a:r>
+              <a:rPr lang="en-US"/>
+              <a:t>Second level</a:t>
+            </a:r>
+          </a:p>
+          <a:p>
+            <a:pPr lvl="2"/>
+            <a:r>
+              <a:rPr lang="en-US"/>
+              <a:t>Third level</a:t>
+            </a:r>
+          </a:p>
+          <a:p>
+            <a:pPr lvl="3"/>
+            <a:r>
+              <a:rPr lang="en-US"/>
+              <a:t>Fourth level</a:t>
+            </a:r>
+          </a:p>
+          <a:p>
+            <a:pPr lvl="4"/>
+            <a:r>
+              <a:rPr lang="en-US"/>
+              <a:t>Fifth level</a:t>
+            </a:r>
+          </a:p>
+        </p:txBody>
+      </p:sp>
+      <p:sp>
+        <p:nvSpPr>
+          <p:cNvPr id="6" name="Footer Placeholder 5"/>
+          <p:cNvSpPr>
+            <a:spLocks noGrp="1"/>
+          </p:cNvSpPr>
+          <p:nvPr>
+            <p:ph type="ftr" sz="quarter" idx="4"/>
+          </p:nvPr>
+        </p:nvSpPr>
+        <p:spPr>
+          <a:xfrm>
+            <a:off x="0" y="8685213"/>
+            <a:ext cx="2971800" cy="458787"/>
+          </a:xfrm>
+          <a:prstGeom prst="rect">
+            <a:avLst/>
+          </a:prstGeom>
+        </p:spPr>
+        <p:txBody>
+          <a:bodyPr vert="horz" lIns="91440" tIns="45720" rIns="91440" bIns="45720" rtlCol="0" anchor="b"/>
+          <a:lstStyle>
+            <a:lvl1pPr algn="l">
+              <a:defRPr sz="1200"/>
+            </a:lvl1pPr>
+          </a:lstStyle>
+          <a:p>
+            <a:endParaRPr lang="en-US"/>
+          </a:p>
+        </p:txBody>
+      </p:sp>
+      <p:sp>
+        <p:nvSpPr>
+          <p:cNvPr id="7" name="Slide Number Placeholder 6"/>
+          <p:cNvSpPr>
+            <a:spLocks noGrp="1"/>
+          </p:cNvSpPr>
+          <p:nvPr>
+            <p:ph type="sldNum" sz="quarter" idx="5"/>
+          </p:nvPr>
+        </p:nvSpPr>
+        <p:spPr>
+          <a:xfrm>
+            <a:off x="3884613" y="8685213"/>
+            <a:ext cx="2971800" cy="458787"/>
+          </a:xfrm>
+          <a:prstGeom prst="rect">
+            <a:avLst/>
+          </a:prstGeom>
+        </p:spPr>
+        <p:txBody>
+          <a:bodyPr vert="horz" lIns="91440" tIns="45720" rIns="91440" bIns="45720" rtlCol="0" anchor="b"/>
+          <a:lstStyle>
+            <a:lvl1pPr algn="r">
+              <a:defRPr sz="1200"/>
+            </a:lvl1pPr>
+          </a:lstStyle>
+          <a:p>
+            <a:fld id="{CE5E9CC1-C706-0F49-92D6-E571CC5EEA8F}" type="slidenum">
+              <a:rPr lang="en-US"/>
+              <a:t>‹#›</a:t>
+            </a:fld>
+            <a:endParaRPr lang="en-US"/>
+          </a:p>
+        </p:txBody>
+      </p:sp>
     </p:spTree>
     <p:extLst>
       <p:ext uri="{BB962C8B-B14F-4D97-AF65-F5344CB8AC3E}">
-        <p14:creationId xmlns:p14="http://schemas.microsoft.com/office/powerpoint/2010/main" val="2090135406"/>
+        <p14:creationId xmlns:p14="http://schemas.microsoft.com/office/powerpoint/2010/main" val="1024086991"/>
       </p:ext>
     </p:extLst>
   </p:cSld>
@@ -299,6 +518,15 @@
           <a:bodyPr/>
           <a:lstStyle/>
           <a:p>
+            <a:r>
+              <a:rPr lang="en-US" dirty="0"/>
+              <a:t>SLIDE 1 SCRIPT (~30 seconds):
+"Good [morning/afternoon/evening] everyone. Thank you for joining today. My name is Farooq Mahmud,
+and this is my capstone presentation for IDC 6940. The project is titled 'Comparing ARIMA and LSTM
+for Short-Term Forecasting of Daily Average Uber Trip Duration in New York City.' Over the next 20
+minutes I'll walk you through the motivation, the methods, the implementation, the results, and
+what I learned from this project. Let's get started."</a:t>
+            </a:r>
             <a:endParaRPr lang="en-US" dirty="0"/>
           </a:p>
         </p:txBody>
@@ -383,6 +611,23 @@
           <a:bodyPr/>
           <a:lstStyle/>
           <a:p>
+            <a:r>
+              <a:rPr lang="en-US" dirty="0"/>
+              <a:t>SLIDE 10 SCRIPT (~1.5 minutes):
+"For the experimental design, both models use the same chronological split. The last
+14 days of 2024-December 18 through December 31-are held out as the test set. The
+preceding 30 days form the validation set, and all remaining data is training.
+This strict chronological split is essential. You must never train on future data
+when evaluating a time series model, because that would leak future information and
+produce artificially optimistic results.
+Both models are evaluated on the exact same 14 test days using two metrics. sMAPE-
+symmetric mean absolute percentage error-is scale-independent and symmetric, treating
+over- and under-forecasting equally. MASE-mean absolute scaled error-benchmarks
+the forecast against a naive forecast on the training data. A naive foreacast meaning the last known value is used.
+A MASE below 1 means the model beats the naive forecast; above 1 means it doesn't. Since sMAPE is
+returned as a proportion by the R Metrics package, I multiply by 100 to express it
+as a percentage."</a:t>
+            </a:r>
             <a:endParaRPr lang="en-US" dirty="0"/>
           </a:p>
         </p:txBody>
@@ -467,6 +712,29 @@
           <a:bodyPr/>
           <a:lstStyle/>
           <a:p>
+            <a:r>
+              <a:rPr lang="en-US" dirty="0"/>
+              <a:t>SLIDE 11 SCRIPT (~2 minutes):
+"Now let me talk about the code and implementation, because this is where a lot of the
+real work happened.
+The code is entirely original. I did not copy from any specific GitHub repository.
+The PySpark preprocessing pipeline-all the filtering, cleaning, and aggregation-I
+wrote from scratch for this project, guided by the PySpark documentation and the
+structure of the NYC TLC data dictionary.
+The R LSTM pipeline follows well-known patterns documented in the Keras time series
+tutorial and the rwanjohi LSTM-in-R repository. However, the specific combination
+of the functional Keras API, custom create_sequences function, min-max scaling
+recursive forecasting loop, and MASE/sMAPE evaluation is original code
+I wrote for this project.
+I actually spent a good part of the project searching public GitHub repos to check
+whether similar code existed. The conclusion was that no single public repository
+contains code substantially identical to the capstone's appendix. The closest
+conceptual matches are the Keras official time series tutorial-which the paper
+already cites-and rwanjohi's LSTM R repo, which uses a different API style and
+differencing-based preprocessing rather than sliding windows.
+The biggest implementation challenge was LSTM reproducibility, which I'll talk
+about on the next slide."</a:t>
+            </a:r>
             <a:endParaRPr lang="en-US" dirty="0"/>
           </a:p>
         </p:txBody>
@@ -551,6 +819,32 @@
           <a:bodyPr/>
           <a:lstStyle/>
           <a:p>
+            <a:r>
+              <a:rPr lang="en-US" dirty="0"/>
+              <a:t>SLIDE 12 SCRIPT (~2 minutes):
+"The single biggest challenge in the implementation was LSTM reproducibility. Unlike
+ARIMA, which is a deterministic algorithm given the same data, LSTM training is
+stochastic. The randomness comes from three sources: weight initialization, the
+random validation split during training, and dropout during each forward pass.
+I attempted to fix the random seed using TensorFlow's set_random_seed and R's
+set.seed, but in our environment-R with Keras on Windows-seed fixing did not produce
+consistent results across runs. The sMAPE and MASE values shifted noticeably from
+run to run.
+The solution I adopted was to run the LSTM pipeline five independent times and report
+the mean and standard deviation of the metrics across those five runs. This gives a
+statistically honest summary: you can see both the central tendency and the variability
+of the LSTM's performance, which makes the comparison with the deterministic ARIMA
+result much more meaningful.
+A second challenge was infrastructure. I chose Google Colab to avoid the hassle of
+setting up PySpark locally-Colab provides a ready-to-use environment with just a
+pip install. The full pipeline ran in about 14 minutes on 200 million rows. Looking at
+the cell-level timings, three steps dominated: the IQR calculation took about 6 minutes-that's
+over 40% of the total runtime-because approxQuantile has to scan the full dataset for each
+column. The Uber filter plus count action took another 2.6 minutes, and the descriptive
+statistics call took 1.7 minutes. Everything else was negligible. I used PySpark's
+approxQuantile function, which is approximate by design but fast enough at this scale,
+and accurate enough for outlier detection."</a:t>
+            </a:r>
             <a:endParaRPr lang="en-US" dirty="0"/>
           </a:p>
         </p:txBody>
@@ -635,6 +929,15 @@
           <a:bodyPr/>
           <a:lstStyle/>
           <a:p>
+            <a:r>
+              <a:rPr lang="en-US" dirty="0"/>
+              <a:t>SLIDE 13 SCRIPT (~1.5 minutes):
+"Let's look at the results. This plot shows the ARIMA 14-day point forecast together
+with the 80% and 95% prediction intervals, compared against the actual values.
+Most of the actual values fall within the 95% prediction interval, which is good. A couple of points-particularly
+around Christmas-fall at the edge of or outside the 80% interval, reflecting the
+holiday-driven deviation that neither model anticipated."</a:t>
+            </a:r>
             <a:endParaRPr lang="en-US" dirty="0"/>
           </a:p>
         </p:txBody>
@@ -719,6 +1022,22 @@
           <a:bodyPr/>
           <a:lstStyle/>
           <a:p>
+            <a:r>
+              <a:rPr lang="en-US" dirty="0"/>
+              <a:t>SLIDE 14 SCRIPT (~2 minutes):
+"Now let's add LSTM to the picture. Overlaying the two forecasts, LSTM is slightly
+smoother than ARIMA with a gentle downward trend, reflecting that the network is
+averaging toward the historical mean and picking up a slight downward signal in the
+recent data. But like ARIMA, it missed the Christmas dip entirely.
+The metric table tells the story. ARIMA achieved an sMAPE of 7.58% and a MASE of
+1.93. The LSTM averaged an sMAPE of 8.05% plus or minus 0.34 percentage points, and
+a MASE of 2.09 plus or minus 0.09, across five independent runs.
+On both metrics, ARIMA edged out LSTM. The gap is modest-less than half a percentage
+point on sMAPE-but it's consistent. Worth noting: both models have MASE above 1,
+which means neither beats a naive forecast on this test window. That's
+an honest result-the 14-day holiday period is simply hard to forecast with a
+univariate model."</a:t>
+            </a:r>
             <a:endParaRPr lang="en-US" dirty="0"/>
           </a:p>
         </p:txBody>
@@ -803,6 +1122,16 @@
           <a:bodyPr/>
           <a:lstStyle/>
           <a:p>
+            <a:r>
+              <a:rPr lang="en-US" dirty="0"/>
+              <a:t>SLIDE 15 SCRIPT (~1.5 minutes):
+"The LSTM training and validation loss curves both decrease quickly in early epochs and
+then flatten. The diamond markers indicate the epochs where the minimum training loss
+and minimum validation loss occurred. There is no sign of overfitting: the
+validation loss doesn't rise while the training loss continues to fall. Both
+curves stabilize well within the 100-epochs, confirming that early stopping
+fired appropriately and that additional epochs would not have improved the forecast."</a:t>
+            </a:r>
             <a:endParaRPr lang="en-US" dirty="0"/>
           </a:p>
         </p:txBody>
@@ -887,6 +1216,25 @@
           <a:bodyPr/>
           <a:lstStyle/>
           <a:p>
+            <a:r>
+              <a:rPr lang="en-US" dirty="0"/>
+              <a:t>SLIDE 16 SCRIPT (~1.5 minutes):
+"So what do these results mean? A few key interpretations.
+First, for a short-horizon univariate forecasting problem with only 366 training
+observations, ARIMA is a strong baseline. It is deterministic, interpretable, and
+runs in seconds. The LSTM, by contrast, requires careful hyperparameter tuning,
+careful handling of scaling, early stopping, and multiple runs to get a stable metric
+estimate. All that extra complexity yielded a slightly worse result.
+Second, both models struggled with holiday effects. December 25 saw a sharp drop
+in average trip duration, likely because fewer riders take longer trips on Christmas
+Day. A univariate model with no calendar features simply cannot anticipate this.
+Third, the LSTM's run-to-run variability-roughly ±0.34 sMAPE points-is not negligible.
+When two models are separated by less than half a percentage point, that variability
+matters. Reporting a single LSTM run would be misleading.
+The broader takeaway is that the assumption 'deep learning is always better' does
+not hold in small-data, short-horizon settings. ARIMA's simplicity is a strength
+when data are limited."</a:t>
+            </a:r>
             <a:endParaRPr lang="en-US" dirty="0"/>
           </a:p>
         </p:txBody>
@@ -971,6 +1319,21 @@
           <a:bodyPr/>
           <a:lstStyle/>
           <a:p>
+            <a:r>
+              <a:rPr lang="en-US" dirty="0"/>
+              <a:t>SLIDE 17 SCRIPT (~1 minute):
+"Let me summarize the conclusions. The capstone set out to answer a concrete question:
+ARIMA or LSTM for 14-day forecasting of daily Uber trip duration? The answer is that
+ARIMA performed slightly better on sMAPE and MASE in this controlled experiment.
+The work contributes a fully reproducible pipeline-from a 200-million-row PySpark ETL
+all the way through to metric evaluation-that others can replicate and extend. The honest
+reporting of LSTM variability across five runs adds statistical rigor that a single
+reported run would lack.
+The result is not a blanket endorsement of ARIMA over neural networks. It's a concrete,
+data-driven demonstration that in the right conditions-small sample, univariate,
+short horizon-classical methods remain competitive. Choosing the right tool requires
+understanding both the data and the limitations of each method."</a:t>
+            </a:r>
             <a:endParaRPr lang="en-US" dirty="0"/>
           </a:p>
         </p:txBody>
@@ -1055,6 +1418,21 @@
           <a:bodyPr/>
           <a:lstStyle/>
           <a:p>
+            <a:r>
+              <a:rPr lang="en-US" dirty="0"/>
+              <a:t>SLIDE 18 SCRIPT (~45 seconds):
+"Looking forward, there are three concrete directions to extend this work.
+First and most impactful: extend the dataset. More years of NYC TLC data would give
+the LSTM far more training sequences and might change the comparison result. A model
+trained on three or four years of data versus one year is a fundamentally different
+experiment, and would let us reassess whether ARIMA's advantage holds.
+Second, add external variables. Weather data, holiday indicators, and day-of-week
+features are readily available and would likely help both models-but especially LSTM,
+which can incorporate multivariate inputs naturally.
+Third, improve reproducibility. Exploring deterministic training options in TensorFlow
+could resolve the seed-fixing issue and eliminate the need for averaging across
+multiple runs to get stable metrics."</a:t>
+            </a:r>
             <a:endParaRPr lang="en-US" dirty="0"/>
           </a:p>
         </p:txBody>
@@ -1139,6 +1517,13 @@
           <a:bodyPr/>
           <a:lstStyle/>
           <a:p>
+            <a:r>
+              <a:rPr lang="en-US" dirty="0"/>
+              <a:t>SLIDE 19 SCRIPT (~30 seconds):
+"Thank you for your time. The code, data, and outputs for this project are all
+publicly available via the GitHub release linked in the paper. I'm happy to answer
+any questions."</a:t>
+            </a:r>
             <a:endParaRPr lang="en-US" dirty="0"/>
           </a:p>
         </p:txBody>
@@ -1223,6 +1608,14 @@
           <a:bodyPr/>
           <a:lstStyle/>
           <a:p>
+            <a:r>
+              <a:rPr lang="en-US" dirty="0"/>
+              <a:t>SLIDE 2 SCRIPT (~30 seconds):
+"Here's a quick roadmap of the presentation. We'll start with the problem and why it matters,
+then move through the data, the two models, the implementation experience, the results, and
+close with the conclusions and future directions. I'll try to be as concrete as possible
+so you can see exactly what was done at each stage."</a:t>
+            </a:r>
             <a:endParaRPr lang="en-US" dirty="0"/>
           </a:p>
         </p:txBody>
@@ -1307,6 +1700,20 @@
           <a:bodyPr/>
           <a:lstStyle/>
           <a:p>
+            <a:r>
+              <a:rPr lang="en-US" dirty="0"/>
+              <a:t>SLIDE 3 SCRIPT (~1 minute):
+"The central question driving this capstone is straightforward: for a short-horizon, univariate
+time series, does a classical statistical model-ARIMA-outperform a neural sequence model-LSTM?
+This question matters in practice. If you're an operations manager at Uber trying to schedule
+drivers two weeks out, you need a reliable forecast. You also need to know whether it's worth
+the additional complexity of a deep learning model, or whether a simpler classical approach
+gives you equally good-or even better-results.
+The specific target variable is the daily average Uber trip duration in minutes in New York City.
+We have 366 daily observations for the full year 2024, and we produce a 14-day ahead forecast
+with both methods, evaluated on the same test window using two well-established metrics:
+sMAPE and MASE."</a:t>
+            </a:r>
             <a:endParaRPr lang="en-US" dirty="0"/>
           </a:p>
         </p:txBody>
@@ -1391,6 +1798,23 @@
           <a:bodyPr/>
           <a:lstStyle/>
           <a:p>
+            <a:r>
+              <a:rPr lang="en-US" dirty="0"/>
+              <a:t>SLIDE 4 SCRIPT (~1.5 minutes):
+"Let me give a bit more background. Time-series forecasting sits at the heart of statistics and
+data science. ARIMA-AutoRegressive Integrated Moving Average-has been the workhorse of
+univariate forecasting for decades. It's interpretable, well-understood, and performs
+surprisingly well on datasets where the underlying dynamics are relatively simple.
+LSTM networks, which are a type of recurrent neural network designed by Hochreiter and
+Schmidhuber in 1997, were built specifically to capture long-range temporal dependencies
+that vanilla RNNs struggle with because of the vanishing gradient problem. They have become
+extremely popular for time-series tasks ranging from financial forecasting to natural language
+processing.
+The open question this project addresses is whether LSTM's added modeling power is actually
+beneficial when you have a relatively small dataset-366 observations-and a univariate setting.
+Comparative studies in the literature, like the one cited by Prabhat et al. 2024, show mixed
+results and motivate exactly this kind of direct, reproducible comparison."</a:t>
+            </a:r>
             <a:endParaRPr lang="en-US" dirty="0"/>
           </a:p>
         </p:txBody>
@@ -1475,6 +1899,22 @@
           <a:bodyPr/>
           <a:lstStyle/>
           <a:p>
+            <a:r>
+              <a:rPr lang="en-US" dirty="0"/>
+              <a:t>SLIDE 5 SCRIPT (~1.5 minutes):
+"The data come from the New York City Taxi and Limousine Commission, which publishes monthly
+parquet files of every High-Volume For-Hire Vehicle trip in New York City. The raw dataset
+for 2024 contains over 200 million trip records. Of those, about 179 million belong to Uber,
+identified by the license code HV0003.
+The preprocessing was done in PySpark running on Google Colab, because the raw files are
+simply too large to process on a laptop. After filtering to Uber trips, I derived two new
+columns-trip duration in minutes and average speed in miles per hour. I then applied a
+two-step outlier removal: first basic range filters to remove physically impossible trips
+such as a zero-minute duration or a 200-mile ride, and then an IQR-based filter to remove
+statistical outliers. After all of that, about 159 million rows remained, which were
+aggregated to a single CSV file with 366 rows-one row per day-containing the date and the
+mean trip duration for that day."</a:t>
+            </a:r>
             <a:endParaRPr lang="en-US" dirty="0"/>
           </a:p>
         </p:txBody>
@@ -1559,6 +1999,16 @@
           <a:bodyPr/>
           <a:lstStyle/>
           <a:p>
+            <a:r>
+              <a:rPr lang="en-US" dirty="0"/>
+              <a:t>SLIDE 6 SCRIPT (~1 minute):
+"Here's what the final time series looks like. You can see 366 points running from January
+through December 2024. There's a clear seasonal pattern-trip durations tend to be longer on
+weekdays than on weekends, and there are dips around major holidays. The December 25 dip is
+particularly visible. The series is relatively smooth and stationary-looking, which is
+actually a favorable property for ARIMA. For LSTM, the weekly oscillation gives the model
+a repeating pattern to learn."</a:t>
+            </a:r>
             <a:endParaRPr lang="en-US" dirty="0"/>
           </a:p>
         </p:txBody>
@@ -1643,6 +2093,23 @@
           <a:bodyPr/>
           <a:lstStyle/>
           <a:p>
+            <a:r>
+              <a:rPr lang="en-US" dirty="0"/>
+              <a:t>SLIDE 7 SCRIPT (~2 minutes):
+"Now let me walk through the mathematics. ARIMA stands for AutoRegressive Integrated Moving
+Average. The general form is ARIMA(p, d, q). After d rounds of differencing to achieve
+stationarity, the model expresses the current value as a linear combination of the p most
+recent past values-that's the autoregressive part-plus a linear combination of the q most
+recent forecast errors-that's the moving average part-plus white noise.
+The R forecast package's auto.arima function automates model selection. It first runs the
+Augmented Dickey-Fuller test to determine how many rounds of differencing are needed, then
+searches over combinations of p and q, selecting the one that minimizes AIC and BIC.
+In this project, auto.arima selected ARIMA(1, 1, 4). That means: one differencing step to
+remove the trend and achieve stationarity, an autoregressive term that depends on the most
+recent observation, and four moving-average terms that incorporate forecast errors from the
+last four time steps. Intuitively, the MA(4) terms help the model recover quickly from
+short-term anomalies like an unusual traffic event."</a:t>
+            </a:r>
             <a:endParaRPr lang="en-US" dirty="0"/>
           </a:p>
         </p:txBody>
@@ -1727,6 +2194,27 @@
           <a:bodyPr/>
           <a:lstStyle/>
           <a:p>
+            <a:r>
+              <a:rPr lang="en-US" dirty="0"/>
+              <a:t>SLIDE 8 SCRIPT (~2 minutes):
+"The second model is an LSTM network implemented in R using the Keras package. Let me
+describe the architecture. The input to the model is a 3-dimensional array: samples,
+time steps, and features. Here, features is just 1 since this is a univariate series.
+The time steps dimension is the sequence length, which I set to 21 days. I chose 21
+because the series shows weekly cycles-weekdays and weekends behave differently. With
+three weeks of context, the LSTM sees three full repetitions of the weekly pattern,
+giving it enough information to recognize and extrapolate the cycle.
+The model has a single LSTM layer with 32 hidden neurons. After the LSTM layer there's a
+dropout layer with a rate of 0.2, which randomly zeros out 20% of the neurons during
+each training step to reduce overfitting. Finally, a dense output layer with a single
+neuron produces the predicted value for the next day.
+The model is trained to minimize mean squared error using the Adam optimizer.
+Early stopping monitors the validation loss with a patience of 15 epochs and restores
+the best weights found during training.
+Forecasting is done recursively: I feed the last 21-day window before the test period
+to the model, predict day 1, append that prediction to the window, drop the oldest
+value, and repeat 14 times to get the full 14-day forecast."</a:t>
+            </a:r>
             <a:endParaRPr lang="en-US" dirty="0"/>
           </a:p>
         </p:txBody>
@@ -1811,6 +2299,12 @@
           <a:bodyPr/>
           <a:lstStyle/>
           <a:p>
+            <a:r>
+              <a:rPr lang="en-US" dirty="0"/>
+              <a:t>SLIDE 9 SCRIPT (~30 seconds):
+"Here's a visual of the LSTM architecture showing how data flows from the input sequence
+through the LSTM layer, dropout, and into the single output neuron."</a:t>
+            </a:r>
             <a:endParaRPr lang="en-US" dirty="0"/>
           </a:p>
         </p:txBody>
@@ -1884,11 +2378,6 @@
 <file path=ppt/slideMasters/slideMaster1.xml><?xml version="1.0" encoding="utf-8"?>
 <p:sldMaster xmlns:a="http://schemas.openxmlformats.org/drawingml/2006/main" xmlns:r="http://schemas.openxmlformats.org/officeDocument/2006/relationships" xmlns:p="http://schemas.openxmlformats.org/presentationml/2006/main">
   <p:cSld>
-    <p:bg>
-      <p:bgRef idx="1001">
-        <a:schemeClr val="bg1"/>
-      </p:bgRef>
-    </p:bg>
     <p:spTree>
       <p:nvGrpSpPr>
         <p:cNvPr id="1" name=""/>
@@ -2169,7 +2658,7 @@
     <p:bg>
       <p:bgPr>
         <a:blipFill dpi="0" rotWithShape="1">
-          <a:blip r:embed="rId3">
+          <a:blip r:embed="rId1">
             <a:lum/>
           </a:blip>
           <a:srcRect/>
@@ -2208,7 +2697,7 @@
     <p:bg>
       <p:bgPr>
         <a:blipFill dpi="0" rotWithShape="1">
-          <a:blip r:embed="rId3">
+          <a:blip r:embed="rId1">
             <a:lum/>
           </a:blip>
           <a:srcRect/>
@@ -2247,7 +2736,7 @@
     <p:bg>
       <p:bgPr>
         <a:blipFill dpi="0" rotWithShape="1">
-          <a:blip r:embed="rId3">
+          <a:blip r:embed="rId1">
             <a:lum/>
           </a:blip>
           <a:srcRect/>
@@ -2286,7 +2775,7 @@
     <p:bg>
       <p:bgPr>
         <a:blipFill dpi="0" rotWithShape="1">
-          <a:blip r:embed="rId3">
+          <a:blip r:embed="rId1">
             <a:lum/>
           </a:blip>
           <a:srcRect/>
@@ -2325,7 +2814,7 @@
     <p:bg>
       <p:bgPr>
         <a:blipFill dpi="0" rotWithShape="1">
-          <a:blip r:embed="rId3">
+          <a:blip r:embed="rId1">
             <a:lum/>
           </a:blip>
           <a:srcRect/>
@@ -2364,7 +2853,7 @@
     <p:bg>
       <p:bgPr>
         <a:blipFill dpi="0" rotWithShape="1">
-          <a:blip r:embed="rId3">
+          <a:blip r:embed="rId1">
             <a:lum/>
           </a:blip>
           <a:srcRect/>
@@ -2403,7 +2892,7 @@
     <p:bg>
       <p:bgPr>
         <a:blipFill dpi="0" rotWithShape="1">
-          <a:blip r:embed="rId3">
+          <a:blip r:embed="rId1">
             <a:lum/>
           </a:blip>
           <a:srcRect/>
@@ -2442,7 +2931,7 @@
     <p:bg>
       <p:bgPr>
         <a:blipFill dpi="0" rotWithShape="1">
-          <a:blip r:embed="rId3">
+          <a:blip r:embed="rId1">
             <a:lum/>
           </a:blip>
           <a:srcRect/>
@@ -2481,7 +2970,7 @@
     <p:bg>
       <p:bgPr>
         <a:blipFill dpi="0" rotWithShape="1">
-          <a:blip r:embed="rId3">
+          <a:blip r:embed="rId1">
             <a:lum/>
           </a:blip>
           <a:srcRect/>
@@ -2520,7 +3009,7 @@
     <p:bg>
       <p:bgPr>
         <a:blipFill dpi="0" rotWithShape="1">
-          <a:blip r:embed="rId3">
+          <a:blip r:embed="rId1">
             <a:lum/>
           </a:blip>
           <a:srcRect/>
@@ -2559,7 +3048,7 @@
     <p:bg>
       <p:bgPr>
         <a:blipFill dpi="0" rotWithShape="1">
-          <a:blip r:embed="rId3">
+          <a:blip r:embed="rId1">
             <a:lum/>
           </a:blip>
           <a:srcRect/>
@@ -2598,7 +3087,7 @@
     <p:bg>
       <p:bgPr>
         <a:blipFill dpi="0" rotWithShape="1">
-          <a:blip r:embed="rId3">
+          <a:blip r:embed="rId1">
             <a:lum/>
           </a:blip>
           <a:srcRect/>
@@ -2637,7 +3126,7 @@
     <p:bg>
       <p:bgPr>
         <a:blipFill dpi="0" rotWithShape="1">
-          <a:blip r:embed="rId3">
+          <a:blip r:embed="rId1">
             <a:lum/>
           </a:blip>
           <a:srcRect/>
@@ -2676,7 +3165,7 @@
     <p:bg>
       <p:bgPr>
         <a:blipFill dpi="0" rotWithShape="1">
-          <a:blip r:embed="rId3">
+          <a:blip r:embed="rId1">
             <a:lum/>
           </a:blip>
           <a:srcRect/>
@@ -2715,7 +3204,7 @@
     <p:bg>
       <p:bgPr>
         <a:blipFill dpi="0" rotWithShape="1">
-          <a:blip r:embed="rId3">
+          <a:blip r:embed="rId1">
             <a:lum/>
           </a:blip>
           <a:srcRect/>
@@ -2754,7 +3243,7 @@
     <p:bg>
       <p:bgPr>
         <a:blipFill dpi="0" rotWithShape="1">
-          <a:blip r:embed="rId3">
+          <a:blip r:embed="rId1">
             <a:lum/>
           </a:blip>
           <a:srcRect/>
@@ -2793,7 +3282,7 @@
     <p:bg>
       <p:bgPr>
         <a:blipFill dpi="0" rotWithShape="1">
-          <a:blip r:embed="rId3">
+          <a:blip r:embed="rId1">
             <a:lum/>
           </a:blip>
           <a:srcRect/>
@@ -2832,7 +3321,7 @@
     <p:bg>
       <p:bgPr>
         <a:blipFill dpi="0" rotWithShape="1">
-          <a:blip r:embed="rId3">
+          <a:blip r:embed="rId1">
             <a:lum/>
           </a:blip>
           <a:srcRect/>
@@ -2871,7 +3360,7 @@
     <p:bg>
       <p:bgPr>
         <a:blipFill dpi="0" rotWithShape="1">
-          <a:blip r:embed="rId3">
+          <a:blip r:embed="rId1">
             <a:lum/>
           </a:blip>
           <a:srcRect/>
@@ -3197,299 +3686,4 @@
     </a:ext>
   </a:extLst>
 </a:theme>
-</file>
-
-<file path=ppt/theme/theme2.xml><?xml version="1.0" encoding="utf-8"?>
-<a:theme xmlns:a="http://schemas.openxmlformats.org/drawingml/2006/main" name="Office Theme">
-  <a:themeElements>
-    <a:clrScheme name="Office">
-      <a:dk1>
-        <a:sysClr val="windowText" lastClr="000000"/>
-      </a:dk1>
-      <a:lt1>
-        <a:sysClr val="window" lastClr="FFFFFF"/>
-      </a:lt1>
-      <a:dk2>
-        <a:srgbClr val="44546A"/>
-      </a:dk2>
-      <a:lt2>
-        <a:srgbClr val="E7E6E6"/>
-      </a:lt2>
-      <a:accent1>
-        <a:srgbClr val="4472C4"/>
-      </a:accent1>
-      <a:accent2>
-        <a:srgbClr val="ED7D31"/>
-      </a:accent2>
-      <a:accent3>
-        <a:srgbClr val="A5A5A5"/>
-      </a:accent3>
-      <a:accent4>
-        <a:srgbClr val="FFC000"/>
-      </a:accent4>
-      <a:accent5>
-        <a:srgbClr val="5B9BD5"/>
-      </a:accent5>
-      <a:accent6>
-        <a:srgbClr val="70AD47"/>
-      </a:accent6>
-      <a:hlink>
-        <a:srgbClr val="0563C1"/>
-      </a:hlink>
-      <a:folHlink>
-        <a:srgbClr val="954F72"/>
-      </a:folHlink>
-    </a:clrScheme>
-    <a:fontScheme name="Office">
-      <a:majorFont>
-        <a:latin typeface="Calibri Light" panose="020F0302020204030204"/>
-        <a:ea typeface=""/>
-        <a:cs typeface=""/>
-        <a:font script="Jpan" typeface="游ゴシック Light"/>
-        <a:font script="Hang" typeface="맑은 고딕"/>
-        <a:font script="Hans" typeface="等线 Light"/>
-        <a:font script="Hant" typeface="新細明體"/>
-        <a:font script="Arab" typeface="Times New Roman"/>
-        <a:font script="Hebr" typeface="Times New Roman"/>
-        <a:font script="Thai" typeface="Angsana New"/>
-        <a:font script="Ethi" typeface="Nyala"/>
-        <a:font script="Beng" typeface="Vrinda"/>
-        <a:font script="Gujr" typeface="Shruti"/>
-        <a:font script="Khmr" typeface="MoolBoran"/>
-        <a:font script="Knda" typeface="Tunga"/>
-        <a:font script="Guru" typeface="Raavi"/>
-        <a:font script="Cans" typeface="Euphemia"/>
-        <a:font script="Cher" typeface="Plantagenet Cherokee"/>
-        <a:font script="Yiii" typeface="Microsoft Yi Baiti"/>
-        <a:font script="Tibt" typeface="Microsoft Himalaya"/>
-        <a:font script="Thaa" typeface="MV Boli"/>
-        <a:font script="Deva" typeface="Mangal"/>
-        <a:font script="Telu" typeface="Gautami"/>
-        <a:font script="Taml" typeface="Latha"/>
-        <a:font script="Syrc" typeface="Estrangelo Edessa"/>
-        <a:font script="Orya" typeface="Kalinga"/>
-        <a:font script="Mlym" typeface="Kartika"/>
-        <a:font script="Laoo" typeface="DokChampa"/>
-        <a:font script="Sinh" typeface="Iskoola Pota"/>
-        <a:font script="Mong" typeface="Mongolian Baiti"/>
-        <a:font script="Viet" typeface="Times New Roman"/>
-        <a:font script="Uigh" typeface="Microsoft Uighur"/>
-        <a:font script="Geor" typeface="Sylfaen"/>
-        <a:font script="Armn" typeface="Arial"/>
-        <a:font script="Bugi" typeface="Leelawadee UI"/>
-        <a:font script="Bopo" typeface="Microsoft JhengHei"/>
-        <a:font script="Java" typeface="Javanese Text"/>
-        <a:font script="Lisu" typeface="Segoe UI"/>
-        <a:font script="Mymr" typeface="Myanmar Text"/>
-        <a:font script="Nkoo" typeface="Ebrima"/>
-        <a:font script="Olck" typeface="Nirmala UI"/>
-        <a:font script="Osma" typeface="Ebrima"/>
-        <a:font script="Phag" typeface="Phagspa"/>
-        <a:font script="Syrn" typeface="Estrangelo Edessa"/>
-        <a:font script="Syrj" typeface="Estrangelo Edessa"/>
-        <a:font script="Syre" typeface="Estrangelo Edessa"/>
-        <a:font script="Sora" typeface="Nirmala UI"/>
-        <a:font script="Tale" typeface="Microsoft Tai Le"/>
-        <a:font script="Talu" typeface="Microsoft New Tai Lue"/>
-        <a:font script="Tfng" typeface="Ebrima"/>
-      </a:majorFont>
-      <a:minorFont>
-        <a:latin typeface="Calibri" panose="020F0502020204030204"/>
-        <a:ea typeface=""/>
-        <a:cs typeface=""/>
-        <a:font script="Jpan" typeface="游ゴシック"/>
-        <a:font script="Hang" typeface="맑은 고딕"/>
-        <a:font script="Hans" typeface="等线"/>
-        <a:font script="Hant" typeface="新細明體"/>
-        <a:font script="Arab" typeface="Arial"/>
-        <a:font script="Hebr" typeface="Arial"/>
-        <a:font script="Thai" typeface="Cordia New"/>
-        <a:font script="Ethi" typeface="Nyala"/>
-        <a:font script="Beng" typeface="Vrinda"/>
-        <a:font script="Gujr" typeface="Shruti"/>
-        <a:font script="Khmr" typeface="DaunPenh"/>
-        <a:font script="Knda" typeface="Tunga"/>
-        <a:font script="Guru" typeface="Raavi"/>
-        <a:font script="Cans" typeface="Euphemia"/>
-        <a:font script="Cher" typeface="Plantagenet Cherokee"/>
-        <a:font script="Yiii" typeface="Microsoft Yi Baiti"/>
-        <a:font script="Tibt" typeface="Microsoft Himalaya"/>
-        <a:font script="Thaa" typeface="MV Boli"/>
-        <a:font script="Deva" typeface="Mangal"/>
-        <a:font script="Telu" typeface="Gautami"/>
-        <a:font script="Taml" typeface="Latha"/>
-        <a:font script="Syrc" typeface="Estrangelo Edessa"/>
-        <a:font script="Orya" typeface="Kalinga"/>
-        <a:font script="Mlym" typeface="Kartika"/>
-        <a:font script="Laoo" typeface="DokChampa"/>
-        <a:font script="Sinh" typeface="Iskoola Pota"/>
-        <a:font script="Mong" typeface="Mongolian Baiti"/>
-        <a:font script="Viet" typeface="Arial"/>
-        <a:font script="Uigh" typeface="Microsoft Uighur"/>
-        <a:font script="Geor" typeface="Sylfaen"/>
-        <a:font script="Armn" typeface="Arial"/>
-        <a:font script="Bugi" typeface="Leelawadee UI"/>
-        <a:font script="Bopo" typeface="Microsoft JhengHei"/>
-        <a:font script="Java" typeface="Javanese Text"/>
-        <a:font script="Lisu" typeface="Segoe UI"/>
-        <a:font script="Mymr" typeface="Myanmar Text"/>
-        <a:font script="Nkoo" typeface="Ebrima"/>
-        <a:font script="Olck" typeface="Nirmala UI"/>
-        <a:font script="Osma" typeface="Ebrima"/>
-        <a:font script="Phag" typeface="Phagspa"/>
-        <a:font script="Syrn" typeface="Estrangelo Edessa"/>
-        <a:font script="Syrj" typeface="Estrangelo Edessa"/>
-        <a:font script="Syre" typeface="Estrangelo Edessa"/>
-        <a:font script="Sora" typeface="Nirmala UI"/>
-        <a:font script="Tale" typeface="Microsoft Tai Le"/>
-        <a:font script="Talu" typeface="Microsoft New Tai Lue"/>
-        <a:font script="Tfng" typeface="Ebrima"/>
-      </a:minorFont>
-    </a:fontScheme>
-    <a:fmtScheme name="Office">
-      <a:fillStyleLst>
-        <a:solidFill>
-          <a:schemeClr val="phClr"/>
-        </a:solidFill>
-        <a:gradFill rotWithShape="1">
-          <a:gsLst>
-            <a:gs pos="0">
-              <a:schemeClr val="phClr">
-                <a:lumMod val="110000"/>
-                <a:satMod val="105000"/>
-                <a:tint val="67000"/>
-              </a:schemeClr>
-            </a:gs>
-            <a:gs pos="50000">
-              <a:schemeClr val="phClr">
-                <a:lumMod val="105000"/>
-                <a:satMod val="103000"/>
-                <a:tint val="73000"/>
-              </a:schemeClr>
-            </a:gs>
-            <a:gs pos="100000">
-              <a:schemeClr val="phClr">
-                <a:lumMod val="105000"/>
-                <a:satMod val="109000"/>
-                <a:tint val="81000"/>
-              </a:schemeClr>
-            </a:gs>
-          </a:gsLst>
-          <a:lin ang="5400000" scaled="0"/>
-        </a:gradFill>
-        <a:gradFill rotWithShape="1">
-          <a:gsLst>
-            <a:gs pos="0">
-              <a:schemeClr val="phClr">
-                <a:satMod val="103000"/>
-                <a:lumMod val="102000"/>
-                <a:tint val="94000"/>
-              </a:schemeClr>
-            </a:gs>
-            <a:gs pos="50000">
-              <a:schemeClr val="phClr">
-                <a:satMod val="110000"/>
-                <a:lumMod val="100000"/>
-                <a:shade val="100000"/>
-              </a:schemeClr>
-            </a:gs>
-            <a:gs pos="100000">
-              <a:schemeClr val="phClr">
-                <a:lumMod val="99000"/>
-                <a:satMod val="120000"/>
-                <a:shade val="78000"/>
-              </a:schemeClr>
-            </a:gs>
-          </a:gsLst>
-          <a:lin ang="5400000" scaled="0"/>
-        </a:gradFill>
-      </a:fillStyleLst>
-      <a:lnStyleLst>
-        <a:ln w="6350" cap="flat" cmpd="sng" algn="ctr">
-          <a:solidFill>
-            <a:schemeClr val="phClr"/>
-          </a:solidFill>
-          <a:prstDash val="solid"/>
-          <a:miter lim="800000"/>
-        </a:ln>
-        <a:ln w="12700" cap="flat" cmpd="sng" algn="ctr">
-          <a:solidFill>
-            <a:schemeClr val="phClr"/>
-          </a:solidFill>
-          <a:prstDash val="solid"/>
-          <a:miter lim="800000"/>
-        </a:ln>
-        <a:ln w="19050" cap="flat" cmpd="sng" algn="ctr">
-          <a:solidFill>
-            <a:schemeClr val="phClr"/>
-          </a:solidFill>
-          <a:prstDash val="solid"/>
-          <a:miter lim="800000"/>
-        </a:ln>
-      </a:lnStyleLst>
-      <a:effectStyleLst>
-        <a:effectStyle>
-          <a:effectLst/>
-        </a:effectStyle>
-        <a:effectStyle>
-          <a:effectLst/>
-        </a:effectStyle>
-        <a:effectStyle>
-          <a:effectLst>
-            <a:outerShdw blurRad="57150" dist="19050" dir="5400000" algn="ctr" rotWithShape="0">
-              <a:srgbClr val="000000">
-                <a:alpha val="63000"/>
-              </a:srgbClr>
-            </a:outerShdw>
-          </a:effectLst>
-        </a:effectStyle>
-      </a:effectStyleLst>
-      <a:bgFillStyleLst>
-        <a:solidFill>
-          <a:schemeClr val="phClr"/>
-        </a:solidFill>
-        <a:solidFill>
-          <a:schemeClr val="phClr">
-            <a:tint val="95000"/>
-            <a:satMod val="170000"/>
-          </a:schemeClr>
-        </a:solidFill>
-        <a:gradFill rotWithShape="1">
-          <a:gsLst>
-            <a:gs pos="0">
-              <a:schemeClr val="phClr">
-                <a:tint val="93000"/>
-                <a:satMod val="150000"/>
-                <a:shade val="98000"/>
-                <a:lumMod val="102000"/>
-              </a:schemeClr>
-            </a:gs>
-            <a:gs pos="50000">
-              <a:schemeClr val="phClr">
-                <a:tint val="98000"/>
-                <a:satMod val="130000"/>
-                <a:shade val="90000"/>
-                <a:lumMod val="103000"/>
-              </a:schemeClr>
-            </a:gs>
-            <a:gs pos="100000">
-              <a:schemeClr val="phClr">
-                <a:shade val="63000"/>
-                <a:satMod val="120000"/>
-              </a:schemeClr>
-            </a:gs>
-          </a:gsLst>
-          <a:lin ang="5400000" scaled="0"/>
-        </a:gradFill>
-      </a:bgFillStyleLst>
-    </a:fmtScheme>
-  </a:themeElements>
-  <a:objectDefaults/>
-  <a:extraClrSchemeLst/>
-  <a:extLst>
-    <a:ext uri="{05A4C25C-085E-4340-85A3-A5531E510DB2}">
-      <thm15:themeFamily xmlns:thm15="http://schemas.microsoft.com/office/thememl/2012/main" name="Office Theme" id="{62F939B6-93AF-4DB8-9C6B-D6C7DFDC589F}" vid="{4A3C46E8-61CC-4603-A589-7422A47A8E4A}"/>
-    </a:ext>
-  </a:extLst>
-</a:theme>
 </file>